--- a/e2e/fixtures/transitions-animations.pptx
+++ b/e2e/fixtures/transitions-animations.pptx
@@ -698,7 +698,7 @@
       </p:grpSpPr>
       <p:sp>
         <p:nvSpPr>
-          <p:cNvPr id="5" name="TextBox 5"/>
+          <p:cNvPr id="2" name="TextBox 5"/>
           <p:cNvSpPr txBox="1"/>
           <p:nvPr/>
         </p:nvSpPr>

--- a/e2e/fixtures/transitions-animations.pptx
+++ b/e2e/fixtures/transitions-animations.pptx
@@ -421,12 +421,10 @@
           <a:bodyPr wrap="square"/>
           <a:lstStyle/>
           <a:p>
-            <a:pPr/>
             <a:r>
-              <a:rPr lang="en-US" dirty="0" sz="2400" b="1"/>
+              <a:rPr lang="en-US" sz="2400" b="1" dirty="0"/>
               <a:t>Slide One</a:t>
             </a:r>
-            <a:endParaRPr lang="en-US"/>
           </a:p>
         </p:txBody>
       </p:sp>
@@ -474,12 +472,10 @@
           <a:bodyPr wrap="square"/>
           <a:lstStyle/>
           <a:p>
-            <a:pPr/>
             <a:r>
-              <a:rPr lang="en-US" dirty="0" sz="2400" b="1"/>
+              <a:rPr lang="en-US" sz="2400" b="1" dirty="0"/>
               <a:t>Transition Target</a:t>
             </a:r>
-            <a:endParaRPr lang="en-US"/>
           </a:p>
         </p:txBody>
       </p:sp>
@@ -530,12 +526,10 @@
           <a:bodyPr wrap="square"/>
           <a:lstStyle/>
           <a:p>
-            <a:pPr/>
             <a:r>
-              <a:rPr lang="en-US" dirty="0" sz="2400" b="1"/>
+              <a:rPr lang="en-US" sz="2400" b="1" dirty="0"/>
               <a:t>Animated Slide</a:t>
             </a:r>
-            <a:endParaRPr lang="en-US"/>
           </a:p>
         </p:txBody>
       </p:sp>
@@ -561,16 +555,14 @@
           <a:bodyPr wrap="square"/>
           <a:lstStyle/>
           <a:p>
-            <a:pPr/>
             <a:r>
-              <a:rPr lang="en-US" dirty="0" sz="1800" b="1">
+              <a:rPr lang="en-US" sz="1800" b="1" dirty="0">
                 <a:solidFill>
                   <a:srgbClr val="FFFFFF"/>
                 </a:solidFill>
               </a:rPr>
               <a:t>ANIMATE ME</a:t>
             </a:r>
-            <a:endParaRPr lang="en-US"/>
           </a:p>
         </p:txBody>
       </p:sp>
@@ -600,18 +592,14 @@
                             </p:stCondLst>
                             <p:childTnLst>
                               <p:par>
-                                <p:cTn id="1" presetID="10" presetClass="entr" presetSubtype="0" fill="hold" nodeType="clickEffect" dur="500">
+                                <p:cTn id="1" presetID="10" presetClass="entr" presetSubtype="0" fill="hold" nodeType="clickEffect" dur="500" grpId="0">
                                   <p:stCondLst>
                                     <p:cond delay="0"/>
                                   </p:stCondLst>
                                   <p:childTnLst>
                                     <p:set>
                                       <p:cBhvr>
-                                        <p:cTn id="2" dur="1" fill="hold">
-                                          <p:stCondLst>
-                                            <p:cond delay="0"/>
-                                          </p:stCondLst>
-                                        </p:cTn>
+                                        <p:cTn id="2" dur="1" fill="hold"/>
                                         <p:tgtEl>
                                           <p:spTgt spid="2"/>
                                         </p:tgtEl>
@@ -715,12 +703,10 @@
           <a:bodyPr wrap="square"/>
           <a:lstStyle/>
           <a:p>
-            <a:pPr/>
             <a:r>
-              <a:rPr lang="en-US" dirty="0" sz="2400" b="1"/>
+              <a:rPr lang="en-US" sz="2400" b="1" dirty="0"/>
               <a:t>End Slide</a:t>
             </a:r>
-            <a:endParaRPr lang="en-US"/>
           </a:p>
         </p:txBody>
       </p:sp>
